--- a/design-system/standard/Mivada_Standard_Light.pptx
+++ b/design-system/standard/Mivada_Standard_Light.pptx
@@ -28416,7 +28416,7 @@
               <a:srgbClr val="EA493F"/>
             </a:solidFill>
             <a:ln>
-              <a:noFill/>
+              <a:solidFill/>
             </a:ln>
             <a:effectLst/>
           </p:spPr>

--- a/design-system/standard/Mivada_Standard_Light.pptx
+++ b/design-system/standard/Mivada_Standard_Light.pptx
@@ -30712,7 +30712,7 @@
         </p:nvSpPr>
         <p:spPr>
           <a:xfrm>
-            <a:off x="707120" y="926374"/>
+            <a:off x="841248" y="926374"/>
             <a:ext cx="10436047" cy="1005840"/>
           </a:xfrm>
           <a:prstGeom prst="rect">

--- a/design-system/standard/Mivada_Standard_Light.pptx
+++ b/design-system/standard/Mivada_Standard_Light.pptx
@@ -7946,50 +7946,6 @@
       </p:sp>
       <p:sp>
         <p:nvSpPr>
-          <p:cNvPr id="7" name="Rectangle 6"/>
-          <p:cNvSpPr/>
-          <p:nvPr/>
-        </p:nvSpPr>
-        <p:spPr>
-          <a:xfrm>
-            <a:off x="877824" y="2212848"/>
-            <a:ext cx="91440" cy="1078992"/>
-          </a:xfrm>
-          <a:prstGeom prst="rect">
-            <a:avLst/>
-          </a:prstGeom>
-          <a:solidFill>
-            <a:srgbClr val="EA493F"/>
-          </a:solidFill>
-          <a:ln>
-            <a:solidFill/>
-          </a:ln>
-          <a:effectLst/>
-        </p:spPr>
-        <p:style>
-          <a:lnRef idx="1">
-            <a:schemeClr val="accent1"/>
-          </a:lnRef>
-          <a:fillRef idx="3">
-            <a:schemeClr val="accent1"/>
-          </a:fillRef>
-          <a:effectRef idx="2">
-            <a:schemeClr val="accent1"/>
-          </a:effectRef>
-          <a:fontRef idx="minor">
-            <a:schemeClr val="lt1"/>
-          </a:fontRef>
-        </p:style>
-        <p:txBody>
-          <a:bodyPr rtlCol="0" anchor="ctr" lIns="0" rIns="0"/>
-          <a:lstStyle/>
-          <a:p>
-            <a:pPr algn="ctr"/>
-          </a:p>
-        </p:txBody>
-      </p:sp>
-      <p:sp>
-        <p:nvSpPr>
           <p:cNvPr id="8" name="TextBox 7"/>
           <p:cNvSpPr txBox="1"/>
           <p:nvPr/>
@@ -8145,50 +8101,6 @@
       </p:sp>
       <p:sp>
         <p:nvSpPr>
-          <p:cNvPr id="12" name="Rectangle 11"/>
-          <p:cNvSpPr/>
-          <p:nvPr/>
-        </p:nvSpPr>
-        <p:spPr>
-          <a:xfrm>
-            <a:off x="4480559" y="2212848"/>
-            <a:ext cx="91440" cy="1078992"/>
-          </a:xfrm>
-          <a:prstGeom prst="rect">
-            <a:avLst/>
-          </a:prstGeom>
-          <a:solidFill>
-            <a:srgbClr val="EA493F"/>
-          </a:solidFill>
-          <a:ln>
-            <a:solidFill/>
-          </a:ln>
-          <a:effectLst/>
-        </p:spPr>
-        <p:style>
-          <a:lnRef idx="1">
-            <a:schemeClr val="accent1"/>
-          </a:lnRef>
-          <a:fillRef idx="3">
-            <a:schemeClr val="accent1"/>
-          </a:fillRef>
-          <a:effectRef idx="2">
-            <a:schemeClr val="accent1"/>
-          </a:effectRef>
-          <a:fontRef idx="minor">
-            <a:schemeClr val="lt1"/>
-          </a:fontRef>
-        </p:style>
-        <p:txBody>
-          <a:bodyPr rtlCol="0" anchor="ctr" lIns="0" rIns="0"/>
-          <a:lstStyle/>
-          <a:p>
-            <a:pPr algn="ctr"/>
-          </a:p>
-        </p:txBody>
-      </p:sp>
-      <p:sp>
-        <p:nvSpPr>
           <p:cNvPr id="13" name="TextBox 12"/>
           <p:cNvSpPr txBox="1"/>
           <p:nvPr/>
@@ -8317,50 +8229,6 @@
             <a:solidFill>
               <a:srgbClr val="E4E4E0"/>
             </a:solidFill>
-          </a:ln>
-          <a:effectLst/>
-        </p:spPr>
-        <p:style>
-          <a:lnRef idx="1">
-            <a:schemeClr val="accent1"/>
-          </a:lnRef>
-          <a:fillRef idx="3">
-            <a:schemeClr val="accent1"/>
-          </a:fillRef>
-          <a:effectRef idx="2">
-            <a:schemeClr val="accent1"/>
-          </a:effectRef>
-          <a:fontRef idx="minor">
-            <a:schemeClr val="lt1"/>
-          </a:fontRef>
-        </p:style>
-        <p:txBody>
-          <a:bodyPr rtlCol="0" anchor="ctr" lIns="0" rIns="0"/>
-          <a:lstStyle/>
-          <a:p>
-            <a:pPr algn="ctr"/>
-          </a:p>
-        </p:txBody>
-      </p:sp>
-      <p:sp>
-        <p:nvSpPr>
-          <p:cNvPr id="17" name="Rectangle 16"/>
-          <p:cNvSpPr/>
-          <p:nvPr/>
-        </p:nvSpPr>
-        <p:spPr>
-          <a:xfrm>
-            <a:off x="8083296" y="2212848"/>
-            <a:ext cx="91440" cy="1078992"/>
-          </a:xfrm>
-          <a:prstGeom prst="rect">
-            <a:avLst/>
-          </a:prstGeom>
-          <a:solidFill>
-            <a:srgbClr val="EA493F"/>
-          </a:solidFill>
-          <a:ln>
-            <a:solidFill/>
           </a:ln>
           <a:effectLst/>
         </p:spPr>
@@ -9598,50 +9466,6 @@
       </p:sp>
       <p:sp>
         <p:nvSpPr>
-          <p:cNvPr id="9" name="Rectangle 8"/>
-          <p:cNvSpPr/>
-          <p:nvPr/>
-        </p:nvSpPr>
-        <p:spPr>
-          <a:xfrm>
-            <a:off x="877824" y="2670048"/>
-            <a:ext cx="54864" cy="420624"/>
-          </a:xfrm>
-          <a:prstGeom prst="rect">
-            <a:avLst/>
-          </a:prstGeom>
-          <a:solidFill>
-            <a:srgbClr val="EA493F"/>
-          </a:solidFill>
-          <a:ln>
-            <a:solidFill/>
-          </a:ln>
-          <a:effectLst/>
-        </p:spPr>
-        <p:style>
-          <a:lnRef idx="1">
-            <a:schemeClr val="accent1"/>
-          </a:lnRef>
-          <a:fillRef idx="3">
-            <a:schemeClr val="accent1"/>
-          </a:fillRef>
-          <a:effectRef idx="2">
-            <a:schemeClr val="accent1"/>
-          </a:effectRef>
-          <a:fontRef idx="minor">
-            <a:schemeClr val="lt1"/>
-          </a:fontRef>
-        </p:style>
-        <p:txBody>
-          <a:bodyPr rtlCol="0" anchor="ctr" lIns="0" rIns="0"/>
-          <a:lstStyle/>
-          <a:p>
-            <a:pPr algn="ctr"/>
-          </a:p>
-        </p:txBody>
-      </p:sp>
-      <p:sp>
-        <p:nvSpPr>
           <p:cNvPr id="10" name="TextBox 9"/>
           <p:cNvSpPr txBox="1"/>
           <p:nvPr/>
@@ -9723,50 +9547,6 @@
       </p:sp>
       <p:sp>
         <p:nvSpPr>
-          <p:cNvPr id="12" name="Rectangle 11"/>
-          <p:cNvSpPr/>
-          <p:nvPr/>
-        </p:nvSpPr>
-        <p:spPr>
-          <a:xfrm>
-            <a:off x="3465576" y="2670048"/>
-            <a:ext cx="54864" cy="420624"/>
-          </a:xfrm>
-          <a:prstGeom prst="rect">
-            <a:avLst/>
-          </a:prstGeom>
-          <a:solidFill>
-            <a:srgbClr val="EA493F"/>
-          </a:solidFill>
-          <a:ln>
-            <a:solidFill/>
-          </a:ln>
-          <a:effectLst/>
-        </p:spPr>
-        <p:style>
-          <a:lnRef idx="1">
-            <a:schemeClr val="accent1"/>
-          </a:lnRef>
-          <a:fillRef idx="3">
-            <a:schemeClr val="accent1"/>
-          </a:fillRef>
-          <a:effectRef idx="2">
-            <a:schemeClr val="accent1"/>
-          </a:effectRef>
-          <a:fontRef idx="minor">
-            <a:schemeClr val="lt1"/>
-          </a:fontRef>
-        </p:style>
-        <p:txBody>
-          <a:bodyPr rtlCol="0" anchor="ctr" lIns="0" rIns="0"/>
-          <a:lstStyle/>
-          <a:p>
-            <a:pPr algn="ctr"/>
-          </a:p>
-        </p:txBody>
-      </p:sp>
-      <p:sp>
-        <p:nvSpPr>
           <p:cNvPr id="13" name="TextBox 12"/>
           <p:cNvSpPr txBox="1"/>
           <p:nvPr/>
@@ -9848,50 +9628,6 @@
       </p:sp>
       <p:sp>
         <p:nvSpPr>
-          <p:cNvPr id="15" name="Rectangle 14"/>
-          <p:cNvSpPr/>
-          <p:nvPr/>
-        </p:nvSpPr>
-        <p:spPr>
-          <a:xfrm>
-            <a:off x="877824" y="3168396"/>
-            <a:ext cx="54864" cy="420624"/>
-          </a:xfrm>
-          <a:prstGeom prst="rect">
-            <a:avLst/>
-          </a:prstGeom>
-          <a:solidFill>
-            <a:srgbClr val="EA493F"/>
-          </a:solidFill>
-          <a:ln>
-            <a:solidFill/>
-          </a:ln>
-          <a:effectLst/>
-        </p:spPr>
-        <p:style>
-          <a:lnRef idx="1">
-            <a:schemeClr val="accent1"/>
-          </a:lnRef>
-          <a:fillRef idx="3">
-            <a:schemeClr val="accent1"/>
-          </a:fillRef>
-          <a:effectRef idx="2">
-            <a:schemeClr val="accent1"/>
-          </a:effectRef>
-          <a:fontRef idx="minor">
-            <a:schemeClr val="lt1"/>
-          </a:fontRef>
-        </p:style>
-        <p:txBody>
-          <a:bodyPr rtlCol="0" anchor="ctr" lIns="0" rIns="0"/>
-          <a:lstStyle/>
-          <a:p>
-            <a:pPr algn="ctr"/>
-          </a:p>
-        </p:txBody>
-      </p:sp>
-      <p:sp>
-        <p:nvSpPr>
           <p:cNvPr id="16" name="TextBox 15"/>
           <p:cNvSpPr txBox="1"/>
           <p:nvPr/>
@@ -9973,50 +9709,6 @@
       </p:sp>
       <p:sp>
         <p:nvSpPr>
-          <p:cNvPr id="18" name="Rectangle 17"/>
-          <p:cNvSpPr/>
-          <p:nvPr/>
-        </p:nvSpPr>
-        <p:spPr>
-          <a:xfrm>
-            <a:off x="3465576" y="3168396"/>
-            <a:ext cx="54864" cy="420624"/>
-          </a:xfrm>
-          <a:prstGeom prst="rect">
-            <a:avLst/>
-          </a:prstGeom>
-          <a:solidFill>
-            <a:srgbClr val="EA493F"/>
-          </a:solidFill>
-          <a:ln>
-            <a:solidFill/>
-          </a:ln>
-          <a:effectLst/>
-        </p:spPr>
-        <p:style>
-          <a:lnRef idx="1">
-            <a:schemeClr val="accent1"/>
-          </a:lnRef>
-          <a:fillRef idx="3">
-            <a:schemeClr val="accent1"/>
-          </a:fillRef>
-          <a:effectRef idx="2">
-            <a:schemeClr val="accent1"/>
-          </a:effectRef>
-          <a:fontRef idx="minor">
-            <a:schemeClr val="lt1"/>
-          </a:fontRef>
-        </p:style>
-        <p:txBody>
-          <a:bodyPr rtlCol="0" anchor="ctr" lIns="0" rIns="0"/>
-          <a:lstStyle/>
-          <a:p>
-            <a:pPr algn="ctr"/>
-          </a:p>
-        </p:txBody>
-      </p:sp>
-      <p:sp>
-        <p:nvSpPr>
           <p:cNvPr id="19" name="TextBox 18"/>
           <p:cNvSpPr txBox="1"/>
           <p:nvPr/>
@@ -10098,50 +9790,6 @@
       </p:sp>
       <p:sp>
         <p:nvSpPr>
-          <p:cNvPr id="21" name="Rectangle 20"/>
-          <p:cNvSpPr/>
-          <p:nvPr/>
-        </p:nvSpPr>
-        <p:spPr>
-          <a:xfrm>
-            <a:off x="877824" y="3666744"/>
-            <a:ext cx="54864" cy="420624"/>
-          </a:xfrm>
-          <a:prstGeom prst="rect">
-            <a:avLst/>
-          </a:prstGeom>
-          <a:solidFill>
-            <a:srgbClr val="EA493F"/>
-          </a:solidFill>
-          <a:ln>
-            <a:solidFill/>
-          </a:ln>
-          <a:effectLst/>
-        </p:spPr>
-        <p:style>
-          <a:lnRef idx="1">
-            <a:schemeClr val="accent1"/>
-          </a:lnRef>
-          <a:fillRef idx="3">
-            <a:schemeClr val="accent1"/>
-          </a:fillRef>
-          <a:effectRef idx="2">
-            <a:schemeClr val="accent1"/>
-          </a:effectRef>
-          <a:fontRef idx="minor">
-            <a:schemeClr val="lt1"/>
-          </a:fontRef>
-        </p:style>
-        <p:txBody>
-          <a:bodyPr rtlCol="0" anchor="ctr" lIns="0" rIns="0"/>
-          <a:lstStyle/>
-          <a:p>
-            <a:pPr algn="ctr"/>
-          </a:p>
-        </p:txBody>
-      </p:sp>
-      <p:sp>
-        <p:nvSpPr>
           <p:cNvPr id="22" name="TextBox 21"/>
           <p:cNvSpPr txBox="1"/>
           <p:nvPr/>
@@ -10223,50 +9871,6 @@
       </p:sp>
       <p:sp>
         <p:nvSpPr>
-          <p:cNvPr id="24" name="Rectangle 23"/>
-          <p:cNvSpPr/>
-          <p:nvPr/>
-        </p:nvSpPr>
-        <p:spPr>
-          <a:xfrm>
-            <a:off x="3465576" y="3666744"/>
-            <a:ext cx="54864" cy="420624"/>
-          </a:xfrm>
-          <a:prstGeom prst="rect">
-            <a:avLst/>
-          </a:prstGeom>
-          <a:solidFill>
-            <a:srgbClr val="EA493F"/>
-          </a:solidFill>
-          <a:ln>
-            <a:solidFill/>
-          </a:ln>
-          <a:effectLst/>
-        </p:spPr>
-        <p:style>
-          <a:lnRef idx="1">
-            <a:schemeClr val="accent1"/>
-          </a:lnRef>
-          <a:fillRef idx="3">
-            <a:schemeClr val="accent1"/>
-          </a:fillRef>
-          <a:effectRef idx="2">
-            <a:schemeClr val="accent1"/>
-          </a:effectRef>
-          <a:fontRef idx="minor">
-            <a:schemeClr val="lt1"/>
-          </a:fontRef>
-        </p:style>
-        <p:txBody>
-          <a:bodyPr rtlCol="0" anchor="ctr" lIns="0" rIns="0"/>
-          <a:lstStyle/>
-          <a:p>
-            <a:pPr algn="ctr"/>
-          </a:p>
-        </p:txBody>
-      </p:sp>
-      <p:sp>
-        <p:nvSpPr>
           <p:cNvPr id="25" name="TextBox 24"/>
           <p:cNvSpPr txBox="1"/>
           <p:nvPr/>
@@ -10348,50 +9952,6 @@
       </p:sp>
       <p:sp>
         <p:nvSpPr>
-          <p:cNvPr id="27" name="Rectangle 26"/>
-          <p:cNvSpPr/>
-          <p:nvPr/>
-        </p:nvSpPr>
-        <p:spPr>
-          <a:xfrm>
-            <a:off x="877824" y="4165091"/>
-            <a:ext cx="54864" cy="420624"/>
-          </a:xfrm>
-          <a:prstGeom prst="rect">
-            <a:avLst/>
-          </a:prstGeom>
-          <a:solidFill>
-            <a:srgbClr val="EA493F"/>
-          </a:solidFill>
-          <a:ln>
-            <a:solidFill/>
-          </a:ln>
-          <a:effectLst/>
-        </p:spPr>
-        <p:style>
-          <a:lnRef idx="1">
-            <a:schemeClr val="accent1"/>
-          </a:lnRef>
-          <a:fillRef idx="3">
-            <a:schemeClr val="accent1"/>
-          </a:fillRef>
-          <a:effectRef idx="2">
-            <a:schemeClr val="accent1"/>
-          </a:effectRef>
-          <a:fontRef idx="minor">
-            <a:schemeClr val="lt1"/>
-          </a:fontRef>
-        </p:style>
-        <p:txBody>
-          <a:bodyPr rtlCol="0" anchor="ctr" lIns="0" rIns="0"/>
-          <a:lstStyle/>
-          <a:p>
-            <a:pPr algn="ctr"/>
-          </a:p>
-        </p:txBody>
-      </p:sp>
-      <p:sp>
-        <p:nvSpPr>
           <p:cNvPr id="28" name="TextBox 27"/>
           <p:cNvSpPr txBox="1"/>
           <p:nvPr/>
@@ -10473,50 +10033,6 @@
       </p:sp>
       <p:sp>
         <p:nvSpPr>
-          <p:cNvPr id="30" name="Rectangle 29"/>
-          <p:cNvSpPr/>
-          <p:nvPr/>
-        </p:nvSpPr>
-        <p:spPr>
-          <a:xfrm>
-            <a:off x="3465576" y="4165091"/>
-            <a:ext cx="54864" cy="420624"/>
-          </a:xfrm>
-          <a:prstGeom prst="rect">
-            <a:avLst/>
-          </a:prstGeom>
-          <a:solidFill>
-            <a:srgbClr val="EA493F"/>
-          </a:solidFill>
-          <a:ln>
-            <a:solidFill/>
-          </a:ln>
-          <a:effectLst/>
-        </p:spPr>
-        <p:style>
-          <a:lnRef idx="1">
-            <a:schemeClr val="accent1"/>
-          </a:lnRef>
-          <a:fillRef idx="3">
-            <a:schemeClr val="accent1"/>
-          </a:fillRef>
-          <a:effectRef idx="2">
-            <a:schemeClr val="accent1"/>
-          </a:effectRef>
-          <a:fontRef idx="minor">
-            <a:schemeClr val="lt1"/>
-          </a:fontRef>
-        </p:style>
-        <p:txBody>
-          <a:bodyPr rtlCol="0" anchor="ctr" lIns="0" rIns="0"/>
-          <a:lstStyle/>
-          <a:p>
-            <a:pPr algn="ctr"/>
-          </a:p>
-        </p:txBody>
-      </p:sp>
-      <p:sp>
-        <p:nvSpPr>
           <p:cNvPr id="31" name="TextBox 30"/>
           <p:cNvSpPr txBox="1"/>
           <p:nvPr/>
@@ -10598,50 +10114,6 @@
       </p:sp>
       <p:sp>
         <p:nvSpPr>
-          <p:cNvPr id="33" name="Rectangle 32"/>
-          <p:cNvSpPr/>
-          <p:nvPr/>
-        </p:nvSpPr>
-        <p:spPr>
-          <a:xfrm>
-            <a:off x="877824" y="4663440"/>
-            <a:ext cx="54864" cy="420624"/>
-          </a:xfrm>
-          <a:prstGeom prst="rect">
-            <a:avLst/>
-          </a:prstGeom>
-          <a:solidFill>
-            <a:srgbClr val="EA493F"/>
-          </a:solidFill>
-          <a:ln>
-            <a:solidFill/>
-          </a:ln>
-          <a:effectLst/>
-        </p:spPr>
-        <p:style>
-          <a:lnRef idx="1">
-            <a:schemeClr val="accent1"/>
-          </a:lnRef>
-          <a:fillRef idx="3">
-            <a:schemeClr val="accent1"/>
-          </a:fillRef>
-          <a:effectRef idx="2">
-            <a:schemeClr val="accent1"/>
-          </a:effectRef>
-          <a:fontRef idx="minor">
-            <a:schemeClr val="lt1"/>
-          </a:fontRef>
-        </p:style>
-        <p:txBody>
-          <a:bodyPr rtlCol="0" anchor="ctr" lIns="0" rIns="0"/>
-          <a:lstStyle/>
-          <a:p>
-            <a:pPr algn="ctr"/>
-          </a:p>
-        </p:txBody>
-      </p:sp>
-      <p:sp>
-        <p:nvSpPr>
           <p:cNvPr id="34" name="TextBox 33"/>
           <p:cNvSpPr txBox="1"/>
           <p:nvPr/>
@@ -10723,50 +10195,6 @@
       </p:sp>
       <p:sp>
         <p:nvSpPr>
-          <p:cNvPr id="36" name="Rectangle 35"/>
-          <p:cNvSpPr/>
-          <p:nvPr/>
-        </p:nvSpPr>
-        <p:spPr>
-          <a:xfrm>
-            <a:off x="3465576" y="4663440"/>
-            <a:ext cx="54864" cy="420624"/>
-          </a:xfrm>
-          <a:prstGeom prst="rect">
-            <a:avLst/>
-          </a:prstGeom>
-          <a:solidFill>
-            <a:srgbClr val="EA493F"/>
-          </a:solidFill>
-          <a:ln>
-            <a:solidFill/>
-          </a:ln>
-          <a:effectLst/>
-        </p:spPr>
-        <p:style>
-          <a:lnRef idx="1">
-            <a:schemeClr val="accent1"/>
-          </a:lnRef>
-          <a:fillRef idx="3">
-            <a:schemeClr val="accent1"/>
-          </a:fillRef>
-          <a:effectRef idx="2">
-            <a:schemeClr val="accent1"/>
-          </a:effectRef>
-          <a:fontRef idx="minor">
-            <a:schemeClr val="lt1"/>
-          </a:fontRef>
-        </p:style>
-        <p:txBody>
-          <a:bodyPr rtlCol="0" anchor="ctr" lIns="0" rIns="0"/>
-          <a:lstStyle/>
-          <a:p>
-            <a:pPr algn="ctr"/>
-          </a:p>
-        </p:txBody>
-      </p:sp>
-      <p:sp>
-        <p:nvSpPr>
           <p:cNvPr id="37" name="TextBox 36"/>
           <p:cNvSpPr txBox="1"/>
           <p:nvPr/>
@@ -10848,50 +10276,6 @@
       </p:sp>
       <p:sp>
         <p:nvSpPr>
-          <p:cNvPr id="39" name="Rectangle 38"/>
-          <p:cNvSpPr/>
-          <p:nvPr/>
-        </p:nvSpPr>
-        <p:spPr>
-          <a:xfrm>
-            <a:off x="877824" y="5161788"/>
-            <a:ext cx="54864" cy="420624"/>
-          </a:xfrm>
-          <a:prstGeom prst="rect">
-            <a:avLst/>
-          </a:prstGeom>
-          <a:solidFill>
-            <a:srgbClr val="EA493F"/>
-          </a:solidFill>
-          <a:ln>
-            <a:solidFill/>
-          </a:ln>
-          <a:effectLst/>
-        </p:spPr>
-        <p:style>
-          <a:lnRef idx="1">
-            <a:schemeClr val="accent1"/>
-          </a:lnRef>
-          <a:fillRef idx="3">
-            <a:schemeClr val="accent1"/>
-          </a:fillRef>
-          <a:effectRef idx="2">
-            <a:schemeClr val="accent1"/>
-          </a:effectRef>
-          <a:fontRef idx="minor">
-            <a:schemeClr val="lt1"/>
-          </a:fontRef>
-        </p:style>
-        <p:txBody>
-          <a:bodyPr rtlCol="0" anchor="ctr" lIns="0" rIns="0"/>
-          <a:lstStyle/>
-          <a:p>
-            <a:pPr algn="ctr"/>
-          </a:p>
-        </p:txBody>
-      </p:sp>
-      <p:sp>
-        <p:nvSpPr>
           <p:cNvPr id="40" name="TextBox 39"/>
           <p:cNvSpPr txBox="1"/>
           <p:nvPr/>
@@ -10973,50 +10357,6 @@
       </p:sp>
       <p:sp>
         <p:nvSpPr>
-          <p:cNvPr id="42" name="Rectangle 41"/>
-          <p:cNvSpPr/>
-          <p:nvPr/>
-        </p:nvSpPr>
-        <p:spPr>
-          <a:xfrm>
-            <a:off x="3465576" y="5161788"/>
-            <a:ext cx="54864" cy="420624"/>
-          </a:xfrm>
-          <a:prstGeom prst="rect">
-            <a:avLst/>
-          </a:prstGeom>
-          <a:solidFill>
-            <a:srgbClr val="EA493F"/>
-          </a:solidFill>
-          <a:ln>
-            <a:solidFill/>
-          </a:ln>
-          <a:effectLst/>
-        </p:spPr>
-        <p:style>
-          <a:lnRef idx="1">
-            <a:schemeClr val="accent1"/>
-          </a:lnRef>
-          <a:fillRef idx="3">
-            <a:schemeClr val="accent1"/>
-          </a:fillRef>
-          <a:effectRef idx="2">
-            <a:schemeClr val="accent1"/>
-          </a:effectRef>
-          <a:fontRef idx="minor">
-            <a:schemeClr val="lt1"/>
-          </a:fontRef>
-        </p:style>
-        <p:txBody>
-          <a:bodyPr rtlCol="0" anchor="ctr" lIns="0" rIns="0"/>
-          <a:lstStyle/>
-          <a:p>
-            <a:pPr algn="ctr"/>
-          </a:p>
-        </p:txBody>
-      </p:sp>
-      <p:sp>
-        <p:nvSpPr>
           <p:cNvPr id="43" name="TextBox 42"/>
           <p:cNvSpPr txBox="1"/>
           <p:nvPr/>
@@ -11177,50 +10517,6 @@
       </p:sp>
       <p:sp>
         <p:nvSpPr>
-          <p:cNvPr id="47" name="Rectangle 46"/>
-          <p:cNvSpPr/>
-          <p:nvPr/>
-        </p:nvSpPr>
-        <p:spPr>
-          <a:xfrm>
-            <a:off x="6291072" y="2670048"/>
-            <a:ext cx="54864" cy="420624"/>
-          </a:xfrm>
-          <a:prstGeom prst="rect">
-            <a:avLst/>
-          </a:prstGeom>
-          <a:solidFill>
-            <a:srgbClr val="EA493F"/>
-          </a:solidFill>
-          <a:ln>
-            <a:solidFill/>
-          </a:ln>
-          <a:effectLst/>
-        </p:spPr>
-        <p:style>
-          <a:lnRef idx="1">
-            <a:schemeClr val="accent1"/>
-          </a:lnRef>
-          <a:fillRef idx="3">
-            <a:schemeClr val="accent1"/>
-          </a:fillRef>
-          <a:effectRef idx="2">
-            <a:schemeClr val="accent1"/>
-          </a:effectRef>
-          <a:fontRef idx="minor">
-            <a:schemeClr val="lt1"/>
-          </a:fontRef>
-        </p:style>
-        <p:txBody>
-          <a:bodyPr rtlCol="0" anchor="ctr" lIns="0" rIns="0"/>
-          <a:lstStyle/>
-          <a:p>
-            <a:pPr algn="ctr"/>
-          </a:p>
-        </p:txBody>
-      </p:sp>
-      <p:sp>
-        <p:nvSpPr>
           <p:cNvPr id="48" name="TextBox 47"/>
           <p:cNvSpPr txBox="1"/>
           <p:nvPr/>
@@ -11302,50 +10598,6 @@
       </p:sp>
       <p:sp>
         <p:nvSpPr>
-          <p:cNvPr id="50" name="Rectangle 49"/>
-          <p:cNvSpPr/>
-          <p:nvPr/>
-        </p:nvSpPr>
-        <p:spPr>
-          <a:xfrm>
-            <a:off x="8878824" y="2670048"/>
-            <a:ext cx="54864" cy="420624"/>
-          </a:xfrm>
-          <a:prstGeom prst="rect">
-            <a:avLst/>
-          </a:prstGeom>
-          <a:solidFill>
-            <a:srgbClr val="EA493F"/>
-          </a:solidFill>
-          <a:ln>
-            <a:solidFill/>
-          </a:ln>
-          <a:effectLst/>
-        </p:spPr>
-        <p:style>
-          <a:lnRef idx="1">
-            <a:schemeClr val="accent1"/>
-          </a:lnRef>
-          <a:fillRef idx="3">
-            <a:schemeClr val="accent1"/>
-          </a:fillRef>
-          <a:effectRef idx="2">
-            <a:schemeClr val="accent1"/>
-          </a:effectRef>
-          <a:fontRef idx="minor">
-            <a:schemeClr val="lt1"/>
-          </a:fontRef>
-        </p:style>
-        <p:txBody>
-          <a:bodyPr rtlCol="0" anchor="ctr" lIns="0" rIns="0"/>
-          <a:lstStyle/>
-          <a:p>
-            <a:pPr algn="ctr"/>
-          </a:p>
-        </p:txBody>
-      </p:sp>
-      <p:sp>
-        <p:nvSpPr>
           <p:cNvPr id="51" name="TextBox 50"/>
           <p:cNvSpPr txBox="1"/>
           <p:nvPr/>
@@ -11427,50 +10679,6 @@
       </p:sp>
       <p:sp>
         <p:nvSpPr>
-          <p:cNvPr id="53" name="Rectangle 52"/>
-          <p:cNvSpPr/>
-          <p:nvPr/>
-        </p:nvSpPr>
-        <p:spPr>
-          <a:xfrm>
-            <a:off x="6291072" y="3168396"/>
-            <a:ext cx="54864" cy="420624"/>
-          </a:xfrm>
-          <a:prstGeom prst="rect">
-            <a:avLst/>
-          </a:prstGeom>
-          <a:solidFill>
-            <a:srgbClr val="EA493F"/>
-          </a:solidFill>
-          <a:ln>
-            <a:solidFill/>
-          </a:ln>
-          <a:effectLst/>
-        </p:spPr>
-        <p:style>
-          <a:lnRef idx="1">
-            <a:schemeClr val="accent1"/>
-          </a:lnRef>
-          <a:fillRef idx="3">
-            <a:schemeClr val="accent1"/>
-          </a:fillRef>
-          <a:effectRef idx="2">
-            <a:schemeClr val="accent1"/>
-          </a:effectRef>
-          <a:fontRef idx="minor">
-            <a:schemeClr val="lt1"/>
-          </a:fontRef>
-        </p:style>
-        <p:txBody>
-          <a:bodyPr rtlCol="0" anchor="ctr" lIns="0" rIns="0"/>
-          <a:lstStyle/>
-          <a:p>
-            <a:pPr algn="ctr"/>
-          </a:p>
-        </p:txBody>
-      </p:sp>
-      <p:sp>
-        <p:nvSpPr>
           <p:cNvPr id="54" name="TextBox 53"/>
           <p:cNvSpPr txBox="1"/>
           <p:nvPr/>
@@ -11552,50 +10760,6 @@
       </p:sp>
       <p:sp>
         <p:nvSpPr>
-          <p:cNvPr id="56" name="Rectangle 55"/>
-          <p:cNvSpPr/>
-          <p:nvPr/>
-        </p:nvSpPr>
-        <p:spPr>
-          <a:xfrm>
-            <a:off x="8878824" y="3168396"/>
-            <a:ext cx="54864" cy="420624"/>
-          </a:xfrm>
-          <a:prstGeom prst="rect">
-            <a:avLst/>
-          </a:prstGeom>
-          <a:solidFill>
-            <a:srgbClr val="EA493F"/>
-          </a:solidFill>
-          <a:ln>
-            <a:solidFill/>
-          </a:ln>
-          <a:effectLst/>
-        </p:spPr>
-        <p:style>
-          <a:lnRef idx="1">
-            <a:schemeClr val="accent1"/>
-          </a:lnRef>
-          <a:fillRef idx="3">
-            <a:schemeClr val="accent1"/>
-          </a:fillRef>
-          <a:effectRef idx="2">
-            <a:schemeClr val="accent1"/>
-          </a:effectRef>
-          <a:fontRef idx="minor">
-            <a:schemeClr val="lt1"/>
-          </a:fontRef>
-        </p:style>
-        <p:txBody>
-          <a:bodyPr rtlCol="0" anchor="ctr" lIns="0" rIns="0"/>
-          <a:lstStyle/>
-          <a:p>
-            <a:pPr algn="ctr"/>
-          </a:p>
-        </p:txBody>
-      </p:sp>
-      <p:sp>
-        <p:nvSpPr>
           <p:cNvPr id="57" name="TextBox 56"/>
           <p:cNvSpPr txBox="1"/>
           <p:nvPr/>
@@ -11677,50 +10841,6 @@
       </p:sp>
       <p:sp>
         <p:nvSpPr>
-          <p:cNvPr id="59" name="Rectangle 58"/>
-          <p:cNvSpPr/>
-          <p:nvPr/>
-        </p:nvSpPr>
-        <p:spPr>
-          <a:xfrm>
-            <a:off x="6291072" y="3666744"/>
-            <a:ext cx="54864" cy="420624"/>
-          </a:xfrm>
-          <a:prstGeom prst="rect">
-            <a:avLst/>
-          </a:prstGeom>
-          <a:solidFill>
-            <a:srgbClr val="EA493F"/>
-          </a:solidFill>
-          <a:ln>
-            <a:solidFill/>
-          </a:ln>
-          <a:effectLst/>
-        </p:spPr>
-        <p:style>
-          <a:lnRef idx="1">
-            <a:schemeClr val="accent1"/>
-          </a:lnRef>
-          <a:fillRef idx="3">
-            <a:schemeClr val="accent1"/>
-          </a:fillRef>
-          <a:effectRef idx="2">
-            <a:schemeClr val="accent1"/>
-          </a:effectRef>
-          <a:fontRef idx="minor">
-            <a:schemeClr val="lt1"/>
-          </a:fontRef>
-        </p:style>
-        <p:txBody>
-          <a:bodyPr rtlCol="0" anchor="ctr" lIns="0" rIns="0"/>
-          <a:lstStyle/>
-          <a:p>
-            <a:pPr algn="ctr"/>
-          </a:p>
-        </p:txBody>
-      </p:sp>
-      <p:sp>
-        <p:nvSpPr>
           <p:cNvPr id="60" name="TextBox 59"/>
           <p:cNvSpPr txBox="1"/>
           <p:nvPr/>
@@ -11802,50 +10922,6 @@
       </p:sp>
       <p:sp>
         <p:nvSpPr>
-          <p:cNvPr id="62" name="Rectangle 61"/>
-          <p:cNvSpPr/>
-          <p:nvPr/>
-        </p:nvSpPr>
-        <p:spPr>
-          <a:xfrm>
-            <a:off x="8878824" y="3666744"/>
-            <a:ext cx="54864" cy="420624"/>
-          </a:xfrm>
-          <a:prstGeom prst="rect">
-            <a:avLst/>
-          </a:prstGeom>
-          <a:solidFill>
-            <a:srgbClr val="EA493F"/>
-          </a:solidFill>
-          <a:ln>
-            <a:solidFill/>
-          </a:ln>
-          <a:effectLst/>
-        </p:spPr>
-        <p:style>
-          <a:lnRef idx="1">
-            <a:schemeClr val="accent1"/>
-          </a:lnRef>
-          <a:fillRef idx="3">
-            <a:schemeClr val="accent1"/>
-          </a:fillRef>
-          <a:effectRef idx="2">
-            <a:schemeClr val="accent1"/>
-          </a:effectRef>
-          <a:fontRef idx="minor">
-            <a:schemeClr val="lt1"/>
-          </a:fontRef>
-        </p:style>
-        <p:txBody>
-          <a:bodyPr rtlCol="0" anchor="ctr" lIns="0" rIns="0"/>
-          <a:lstStyle/>
-          <a:p>
-            <a:pPr algn="ctr"/>
-          </a:p>
-        </p:txBody>
-      </p:sp>
-      <p:sp>
-        <p:nvSpPr>
           <p:cNvPr id="63" name="TextBox 62"/>
           <p:cNvSpPr txBox="1"/>
           <p:nvPr/>
@@ -11927,50 +11003,6 @@
       </p:sp>
       <p:sp>
         <p:nvSpPr>
-          <p:cNvPr id="65" name="Rectangle 64"/>
-          <p:cNvSpPr/>
-          <p:nvPr/>
-        </p:nvSpPr>
-        <p:spPr>
-          <a:xfrm>
-            <a:off x="6291072" y="4165091"/>
-            <a:ext cx="54864" cy="420624"/>
-          </a:xfrm>
-          <a:prstGeom prst="rect">
-            <a:avLst/>
-          </a:prstGeom>
-          <a:solidFill>
-            <a:srgbClr val="EA493F"/>
-          </a:solidFill>
-          <a:ln>
-            <a:solidFill/>
-          </a:ln>
-          <a:effectLst/>
-        </p:spPr>
-        <p:style>
-          <a:lnRef idx="1">
-            <a:schemeClr val="accent1"/>
-          </a:lnRef>
-          <a:fillRef idx="3">
-            <a:schemeClr val="accent1"/>
-          </a:fillRef>
-          <a:effectRef idx="2">
-            <a:schemeClr val="accent1"/>
-          </a:effectRef>
-          <a:fontRef idx="minor">
-            <a:schemeClr val="lt1"/>
-          </a:fontRef>
-        </p:style>
-        <p:txBody>
-          <a:bodyPr rtlCol="0" anchor="ctr" lIns="0" rIns="0"/>
-          <a:lstStyle/>
-          <a:p>
-            <a:pPr algn="ctr"/>
-          </a:p>
-        </p:txBody>
-      </p:sp>
-      <p:sp>
-        <p:nvSpPr>
           <p:cNvPr id="66" name="TextBox 65"/>
           <p:cNvSpPr txBox="1"/>
           <p:nvPr/>
@@ -12052,50 +11084,6 @@
       </p:sp>
       <p:sp>
         <p:nvSpPr>
-          <p:cNvPr id="68" name="Rectangle 67"/>
-          <p:cNvSpPr/>
-          <p:nvPr/>
-        </p:nvSpPr>
-        <p:spPr>
-          <a:xfrm>
-            <a:off x="8878824" y="4165091"/>
-            <a:ext cx="54864" cy="420624"/>
-          </a:xfrm>
-          <a:prstGeom prst="rect">
-            <a:avLst/>
-          </a:prstGeom>
-          <a:solidFill>
-            <a:srgbClr val="EA493F"/>
-          </a:solidFill>
-          <a:ln>
-            <a:solidFill/>
-          </a:ln>
-          <a:effectLst/>
-        </p:spPr>
-        <p:style>
-          <a:lnRef idx="1">
-            <a:schemeClr val="accent1"/>
-          </a:lnRef>
-          <a:fillRef idx="3">
-            <a:schemeClr val="accent1"/>
-          </a:fillRef>
-          <a:effectRef idx="2">
-            <a:schemeClr val="accent1"/>
-          </a:effectRef>
-          <a:fontRef idx="minor">
-            <a:schemeClr val="lt1"/>
-          </a:fontRef>
-        </p:style>
-        <p:txBody>
-          <a:bodyPr rtlCol="0" anchor="ctr" lIns="0" rIns="0"/>
-          <a:lstStyle/>
-          <a:p>
-            <a:pPr algn="ctr"/>
-          </a:p>
-        </p:txBody>
-      </p:sp>
-      <p:sp>
-        <p:nvSpPr>
           <p:cNvPr id="69" name="TextBox 68"/>
           <p:cNvSpPr txBox="1"/>
           <p:nvPr/>
@@ -12177,50 +11165,6 @@
       </p:sp>
       <p:sp>
         <p:nvSpPr>
-          <p:cNvPr id="71" name="Rectangle 70"/>
-          <p:cNvSpPr/>
-          <p:nvPr/>
-        </p:nvSpPr>
-        <p:spPr>
-          <a:xfrm>
-            <a:off x="6291072" y="4663440"/>
-            <a:ext cx="54864" cy="420624"/>
-          </a:xfrm>
-          <a:prstGeom prst="rect">
-            <a:avLst/>
-          </a:prstGeom>
-          <a:solidFill>
-            <a:srgbClr val="EA493F"/>
-          </a:solidFill>
-          <a:ln>
-            <a:solidFill/>
-          </a:ln>
-          <a:effectLst/>
-        </p:spPr>
-        <p:style>
-          <a:lnRef idx="1">
-            <a:schemeClr val="accent1"/>
-          </a:lnRef>
-          <a:fillRef idx="3">
-            <a:schemeClr val="accent1"/>
-          </a:fillRef>
-          <a:effectRef idx="2">
-            <a:schemeClr val="accent1"/>
-          </a:effectRef>
-          <a:fontRef idx="minor">
-            <a:schemeClr val="lt1"/>
-          </a:fontRef>
-        </p:style>
-        <p:txBody>
-          <a:bodyPr rtlCol="0" anchor="ctr" lIns="0" rIns="0"/>
-          <a:lstStyle/>
-          <a:p>
-            <a:pPr algn="ctr"/>
-          </a:p>
-        </p:txBody>
-      </p:sp>
-      <p:sp>
-        <p:nvSpPr>
           <p:cNvPr id="72" name="TextBox 71"/>
           <p:cNvSpPr txBox="1"/>
           <p:nvPr/>
@@ -12302,50 +11246,6 @@
       </p:sp>
       <p:sp>
         <p:nvSpPr>
-          <p:cNvPr id="74" name="Rectangle 73"/>
-          <p:cNvSpPr/>
-          <p:nvPr/>
-        </p:nvSpPr>
-        <p:spPr>
-          <a:xfrm>
-            <a:off x="8878824" y="4663440"/>
-            <a:ext cx="54864" cy="420624"/>
-          </a:xfrm>
-          <a:prstGeom prst="rect">
-            <a:avLst/>
-          </a:prstGeom>
-          <a:solidFill>
-            <a:srgbClr val="EA493F"/>
-          </a:solidFill>
-          <a:ln>
-            <a:solidFill/>
-          </a:ln>
-          <a:effectLst/>
-        </p:spPr>
-        <p:style>
-          <a:lnRef idx="1">
-            <a:schemeClr val="accent1"/>
-          </a:lnRef>
-          <a:fillRef idx="3">
-            <a:schemeClr val="accent1"/>
-          </a:fillRef>
-          <a:effectRef idx="2">
-            <a:schemeClr val="accent1"/>
-          </a:effectRef>
-          <a:fontRef idx="minor">
-            <a:schemeClr val="lt1"/>
-          </a:fontRef>
-        </p:style>
-        <p:txBody>
-          <a:bodyPr rtlCol="0" anchor="ctr" lIns="0" rIns="0"/>
-          <a:lstStyle/>
-          <a:p>
-            <a:pPr algn="ctr"/>
-          </a:p>
-        </p:txBody>
-      </p:sp>
-      <p:sp>
-        <p:nvSpPr>
           <p:cNvPr id="75" name="TextBox 74"/>
           <p:cNvSpPr txBox="1"/>
           <p:nvPr/>
@@ -12427,50 +11327,6 @@
       </p:sp>
       <p:sp>
         <p:nvSpPr>
-          <p:cNvPr id="77" name="Rectangle 76"/>
-          <p:cNvSpPr/>
-          <p:nvPr/>
-        </p:nvSpPr>
-        <p:spPr>
-          <a:xfrm>
-            <a:off x="6291072" y="5161788"/>
-            <a:ext cx="54864" cy="420624"/>
-          </a:xfrm>
-          <a:prstGeom prst="rect">
-            <a:avLst/>
-          </a:prstGeom>
-          <a:solidFill>
-            <a:srgbClr val="EA493F"/>
-          </a:solidFill>
-          <a:ln>
-            <a:solidFill/>
-          </a:ln>
-          <a:effectLst/>
-        </p:spPr>
-        <p:style>
-          <a:lnRef idx="1">
-            <a:schemeClr val="accent1"/>
-          </a:lnRef>
-          <a:fillRef idx="3">
-            <a:schemeClr val="accent1"/>
-          </a:fillRef>
-          <a:effectRef idx="2">
-            <a:schemeClr val="accent1"/>
-          </a:effectRef>
-          <a:fontRef idx="minor">
-            <a:schemeClr val="lt1"/>
-          </a:fontRef>
-        </p:style>
-        <p:txBody>
-          <a:bodyPr rtlCol="0" anchor="ctr" lIns="0" rIns="0"/>
-          <a:lstStyle/>
-          <a:p>
-            <a:pPr algn="ctr"/>
-          </a:p>
-        </p:txBody>
-      </p:sp>
-      <p:sp>
-        <p:nvSpPr>
           <p:cNvPr id="78" name="TextBox 77"/>
           <p:cNvSpPr txBox="1"/>
           <p:nvPr/>
@@ -12525,50 +11381,6 @@
             <a:solidFill>
               <a:srgbClr val="E4E4E0"/>
             </a:solidFill>
-          </a:ln>
-          <a:effectLst/>
-        </p:spPr>
-        <p:style>
-          <a:lnRef idx="1">
-            <a:schemeClr val="accent1"/>
-          </a:lnRef>
-          <a:fillRef idx="3">
-            <a:schemeClr val="accent1"/>
-          </a:fillRef>
-          <a:effectRef idx="2">
-            <a:schemeClr val="accent1"/>
-          </a:effectRef>
-          <a:fontRef idx="minor">
-            <a:schemeClr val="lt1"/>
-          </a:fontRef>
-        </p:style>
-        <p:txBody>
-          <a:bodyPr rtlCol="0" anchor="ctr" lIns="0" rIns="0"/>
-          <a:lstStyle/>
-          <a:p>
-            <a:pPr algn="ctr"/>
-          </a:p>
-        </p:txBody>
-      </p:sp>
-      <p:sp>
-        <p:nvSpPr>
-          <p:cNvPr id="80" name="Rectangle 79"/>
-          <p:cNvSpPr/>
-          <p:nvPr/>
-        </p:nvSpPr>
-        <p:spPr>
-          <a:xfrm>
-            <a:off x="8878824" y="5161788"/>
-            <a:ext cx="54864" cy="420624"/>
-          </a:xfrm>
-          <a:prstGeom prst="rect">
-            <a:avLst/>
-          </a:prstGeom>
-          <a:solidFill>
-            <a:srgbClr val="EA493F"/>
-          </a:solidFill>
-          <a:ln>
-            <a:solidFill/>
           </a:ln>
           <a:effectLst/>
         </p:spPr>
@@ -15967,50 +14779,6 @@
       </p:sp>
       <p:sp>
         <p:nvSpPr>
-          <p:cNvPr id="14" name="Rectangle 13"/>
-          <p:cNvSpPr/>
-          <p:nvPr/>
-        </p:nvSpPr>
-        <p:spPr>
-          <a:xfrm>
-            <a:off x="877824" y="3429000"/>
-            <a:ext cx="91440" cy="1417320"/>
-          </a:xfrm>
-          <a:prstGeom prst="rect">
-            <a:avLst/>
-          </a:prstGeom>
-          <a:solidFill>
-            <a:srgbClr val="EA493F"/>
-          </a:solidFill>
-          <a:ln>
-            <a:solidFill/>
-          </a:ln>
-          <a:effectLst/>
-        </p:spPr>
-        <p:style>
-          <a:lnRef idx="1">
-            <a:schemeClr val="accent1"/>
-          </a:lnRef>
-          <a:fillRef idx="3">
-            <a:schemeClr val="accent1"/>
-          </a:fillRef>
-          <a:effectRef idx="2">
-            <a:schemeClr val="accent1"/>
-          </a:effectRef>
-          <a:fontRef idx="minor">
-            <a:schemeClr val="lt1"/>
-          </a:fontRef>
-        </p:style>
-        <p:txBody>
-          <a:bodyPr rtlCol="0" anchor="ctr" lIns="0" rIns="0"/>
-          <a:lstStyle/>
-          <a:p>
-            <a:pPr algn="ctr"/>
-          </a:p>
-        </p:txBody>
-      </p:sp>
-      <p:sp>
-        <p:nvSpPr>
           <p:cNvPr id="15" name="TextBox 14"/>
           <p:cNvSpPr txBox="1"/>
           <p:nvPr/>
@@ -16139,50 +14907,6 @@
             <a:solidFill>
               <a:srgbClr val="E4E4E0"/>
             </a:solidFill>
-          </a:ln>
-          <a:effectLst/>
-        </p:spPr>
-        <p:style>
-          <a:lnRef idx="1">
-            <a:schemeClr val="accent1"/>
-          </a:lnRef>
-          <a:fillRef idx="3">
-            <a:schemeClr val="accent1"/>
-          </a:fillRef>
-          <a:effectRef idx="2">
-            <a:schemeClr val="accent1"/>
-          </a:effectRef>
-          <a:fontRef idx="minor">
-            <a:schemeClr val="lt1"/>
-          </a:fontRef>
-        </p:style>
-        <p:txBody>
-          <a:bodyPr rtlCol="0" anchor="ctr" lIns="0" rIns="0"/>
-          <a:lstStyle/>
-          <a:p>
-            <a:pPr algn="ctr"/>
-          </a:p>
-        </p:txBody>
-      </p:sp>
-      <p:sp>
-        <p:nvSpPr>
-          <p:cNvPr id="19" name="Rectangle 18"/>
-          <p:cNvSpPr/>
-          <p:nvPr/>
-        </p:nvSpPr>
-        <p:spPr>
-          <a:xfrm>
-            <a:off x="6291072" y="3429000"/>
-            <a:ext cx="91440" cy="1417320"/>
-          </a:xfrm>
-          <a:prstGeom prst="rect">
-            <a:avLst/>
-          </a:prstGeom>
-          <a:solidFill>
-            <a:srgbClr val="111111"/>
-          </a:solidFill>
-          <a:ln>
-            <a:solidFill/>
           </a:ln>
           <a:effectLst/>
         </p:spPr>
@@ -22165,50 +20889,6 @@
       </p:sp>
       <p:sp>
         <p:nvSpPr>
-          <p:cNvPr id="7" name="Rectangle 6"/>
-          <p:cNvSpPr/>
-          <p:nvPr/>
-        </p:nvSpPr>
-        <p:spPr>
-          <a:xfrm>
-            <a:off x="877824" y="2194560"/>
-            <a:ext cx="91440" cy="1234440"/>
-          </a:xfrm>
-          <a:prstGeom prst="rect">
-            <a:avLst/>
-          </a:prstGeom>
-          <a:solidFill>
-            <a:srgbClr val="EA493F"/>
-          </a:solidFill>
-          <a:ln>
-            <a:solidFill/>
-          </a:ln>
-          <a:effectLst/>
-        </p:spPr>
-        <p:style>
-          <a:lnRef idx="1">
-            <a:schemeClr val="accent1"/>
-          </a:lnRef>
-          <a:fillRef idx="3">
-            <a:schemeClr val="accent1"/>
-          </a:fillRef>
-          <a:effectRef idx="2">
-            <a:schemeClr val="accent1"/>
-          </a:effectRef>
-          <a:fontRef idx="minor">
-            <a:schemeClr val="lt1"/>
-          </a:fontRef>
-        </p:style>
-        <p:txBody>
-          <a:bodyPr rtlCol="0" anchor="ctr" lIns="0" rIns="0"/>
-          <a:lstStyle/>
-          <a:p>
-            <a:pPr algn="ctr"/>
-          </a:p>
-        </p:txBody>
-      </p:sp>
-      <p:sp>
-        <p:nvSpPr>
           <p:cNvPr id="8" name="TextBox 7"/>
           <p:cNvSpPr txBox="1"/>
           <p:nvPr/>
@@ -22360,50 +21040,6 @@
       </p:sp>
       <p:sp>
         <p:nvSpPr>
-          <p:cNvPr id="12" name="Rectangle 11"/>
-          <p:cNvSpPr/>
-          <p:nvPr/>
-        </p:nvSpPr>
-        <p:spPr>
-          <a:xfrm>
-            <a:off x="4480559" y="2194560"/>
-            <a:ext cx="91440" cy="1234440"/>
-          </a:xfrm>
-          <a:prstGeom prst="rect">
-            <a:avLst/>
-          </a:prstGeom>
-          <a:solidFill>
-            <a:srgbClr val="EA493F"/>
-          </a:solidFill>
-          <a:ln>
-            <a:solidFill/>
-          </a:ln>
-          <a:effectLst/>
-        </p:spPr>
-        <p:style>
-          <a:lnRef idx="1">
-            <a:schemeClr val="accent1"/>
-          </a:lnRef>
-          <a:fillRef idx="3">
-            <a:schemeClr val="accent1"/>
-          </a:fillRef>
-          <a:effectRef idx="2">
-            <a:schemeClr val="accent1"/>
-          </a:effectRef>
-          <a:fontRef idx="minor">
-            <a:schemeClr val="lt1"/>
-          </a:fontRef>
-        </p:style>
-        <p:txBody>
-          <a:bodyPr rtlCol="0" anchor="ctr" lIns="0" rIns="0"/>
-          <a:lstStyle/>
-          <a:p>
-            <a:pPr algn="ctr"/>
-          </a:p>
-        </p:txBody>
-      </p:sp>
-      <p:sp>
-        <p:nvSpPr>
           <p:cNvPr id="13" name="TextBox 12"/>
           <p:cNvSpPr txBox="1"/>
           <p:nvPr/>
@@ -22528,50 +21164,6 @@
             <a:solidFill>
               <a:srgbClr val="E4E4E0"/>
             </a:solidFill>
-          </a:ln>
-          <a:effectLst/>
-        </p:spPr>
-        <p:style>
-          <a:lnRef idx="1">
-            <a:schemeClr val="accent1"/>
-          </a:lnRef>
-          <a:fillRef idx="3">
-            <a:schemeClr val="accent1"/>
-          </a:fillRef>
-          <a:effectRef idx="2">
-            <a:schemeClr val="accent1"/>
-          </a:effectRef>
-          <a:fontRef idx="minor">
-            <a:schemeClr val="lt1"/>
-          </a:fontRef>
-        </p:style>
-        <p:txBody>
-          <a:bodyPr rtlCol="0" anchor="ctr" lIns="0" rIns="0"/>
-          <a:lstStyle/>
-          <a:p>
-            <a:pPr algn="ctr"/>
-          </a:p>
-        </p:txBody>
-      </p:sp>
-      <p:sp>
-        <p:nvSpPr>
-          <p:cNvPr id="17" name="Rectangle 16"/>
-          <p:cNvSpPr/>
-          <p:nvPr/>
-        </p:nvSpPr>
-        <p:spPr>
-          <a:xfrm>
-            <a:off x="8083296" y="2194560"/>
-            <a:ext cx="91440" cy="1234440"/>
-          </a:xfrm>
-          <a:prstGeom prst="rect">
-            <a:avLst/>
-          </a:prstGeom>
-          <a:solidFill>
-            <a:srgbClr val="EA493F"/>
-          </a:solidFill>
-          <a:ln>
-            <a:solidFill/>
           </a:ln>
           <a:effectLst/>
         </p:spPr>
@@ -23128,50 +21720,6 @@
       </p:sp>
       <p:sp>
         <p:nvSpPr>
-          <p:cNvPr id="7" name="Rectangle 6"/>
-          <p:cNvSpPr/>
-          <p:nvPr/>
-        </p:nvSpPr>
-        <p:spPr>
-          <a:xfrm>
-            <a:off x="877824" y="2157984"/>
-            <a:ext cx="91440" cy="1024128"/>
-          </a:xfrm>
-          <a:prstGeom prst="rect">
-            <a:avLst/>
-          </a:prstGeom>
-          <a:solidFill>
-            <a:srgbClr val="EA493F"/>
-          </a:solidFill>
-          <a:ln>
-            <a:solidFill/>
-          </a:ln>
-          <a:effectLst/>
-        </p:spPr>
-        <p:style>
-          <a:lnRef idx="1">
-            <a:schemeClr val="accent1"/>
-          </a:lnRef>
-          <a:fillRef idx="3">
-            <a:schemeClr val="accent1"/>
-          </a:fillRef>
-          <a:effectRef idx="2">
-            <a:schemeClr val="accent1"/>
-          </a:effectRef>
-          <a:fontRef idx="minor">
-            <a:schemeClr val="lt1"/>
-          </a:fontRef>
-        </p:style>
-        <p:txBody>
-          <a:bodyPr rtlCol="0" anchor="ctr" lIns="0" rIns="0"/>
-          <a:lstStyle/>
-          <a:p>
-            <a:pPr algn="ctr"/>
-          </a:p>
-        </p:txBody>
-      </p:sp>
-      <p:sp>
-        <p:nvSpPr>
           <p:cNvPr id="8" name="TextBox 7"/>
           <p:cNvSpPr txBox="1"/>
           <p:nvPr/>
@@ -23323,50 +21871,6 @@
       </p:sp>
       <p:sp>
         <p:nvSpPr>
-          <p:cNvPr id="12" name="Rectangle 11"/>
-          <p:cNvSpPr/>
-          <p:nvPr/>
-        </p:nvSpPr>
-        <p:spPr>
-          <a:xfrm>
-            <a:off x="4480559" y="2157984"/>
-            <a:ext cx="91440" cy="1024128"/>
-          </a:xfrm>
-          <a:prstGeom prst="rect">
-            <a:avLst/>
-          </a:prstGeom>
-          <a:solidFill>
-            <a:srgbClr val="EA493F"/>
-          </a:solidFill>
-          <a:ln>
-            <a:solidFill/>
-          </a:ln>
-          <a:effectLst/>
-        </p:spPr>
-        <p:style>
-          <a:lnRef idx="1">
-            <a:schemeClr val="accent1"/>
-          </a:lnRef>
-          <a:fillRef idx="3">
-            <a:schemeClr val="accent1"/>
-          </a:fillRef>
-          <a:effectRef idx="2">
-            <a:schemeClr val="accent1"/>
-          </a:effectRef>
-          <a:fontRef idx="minor">
-            <a:schemeClr val="lt1"/>
-          </a:fontRef>
-        </p:style>
-        <p:txBody>
-          <a:bodyPr rtlCol="0" anchor="ctr" lIns="0" rIns="0"/>
-          <a:lstStyle/>
-          <a:p>
-            <a:pPr algn="ctr"/>
-          </a:p>
-        </p:txBody>
-      </p:sp>
-      <p:sp>
-        <p:nvSpPr>
           <p:cNvPr id="13" name="TextBox 12"/>
           <p:cNvSpPr txBox="1"/>
           <p:nvPr/>
@@ -23491,50 +21995,6 @@
             <a:solidFill>
               <a:srgbClr val="E4E4E0"/>
             </a:solidFill>
-          </a:ln>
-          <a:effectLst/>
-        </p:spPr>
-        <p:style>
-          <a:lnRef idx="1">
-            <a:schemeClr val="accent1"/>
-          </a:lnRef>
-          <a:fillRef idx="3">
-            <a:schemeClr val="accent1"/>
-          </a:fillRef>
-          <a:effectRef idx="2">
-            <a:schemeClr val="accent1"/>
-          </a:effectRef>
-          <a:fontRef idx="minor">
-            <a:schemeClr val="lt1"/>
-          </a:fontRef>
-        </p:style>
-        <p:txBody>
-          <a:bodyPr rtlCol="0" anchor="ctr" lIns="0" rIns="0"/>
-          <a:lstStyle/>
-          <a:p>
-            <a:pPr algn="ctr"/>
-          </a:p>
-        </p:txBody>
-      </p:sp>
-      <p:sp>
-        <p:nvSpPr>
-          <p:cNvPr id="17" name="Rectangle 16"/>
-          <p:cNvSpPr/>
-          <p:nvPr/>
-        </p:nvSpPr>
-        <p:spPr>
-          <a:xfrm>
-            <a:off x="8083296" y="2157984"/>
-            <a:ext cx="91440" cy="1024128"/>
-          </a:xfrm>
-          <a:prstGeom prst="rect">
-            <a:avLst/>
-          </a:prstGeom>
-          <a:solidFill>
-            <a:srgbClr val="EA493F"/>
-          </a:solidFill>
-          <a:ln>
-            <a:solidFill/>
           </a:ln>
           <a:effectLst/>
         </p:spPr>
@@ -37291,50 +35751,6 @@
       </p:sp>
       <p:sp>
         <p:nvSpPr>
-          <p:cNvPr id="7" name="Rectangle 6"/>
-          <p:cNvSpPr/>
-          <p:nvPr/>
-        </p:nvSpPr>
-        <p:spPr>
-          <a:xfrm>
-            <a:off x="877824" y="2121408"/>
-            <a:ext cx="91440" cy="1627632"/>
-          </a:xfrm>
-          <a:prstGeom prst="rect">
-            <a:avLst/>
-          </a:prstGeom>
-          <a:solidFill>
-            <a:srgbClr val="EA493F"/>
-          </a:solidFill>
-          <a:ln>
-            <a:solidFill/>
-          </a:ln>
-          <a:effectLst/>
-        </p:spPr>
-        <p:style>
-          <a:lnRef idx="1">
-            <a:schemeClr val="accent1"/>
-          </a:lnRef>
-          <a:fillRef idx="3">
-            <a:schemeClr val="accent1"/>
-          </a:fillRef>
-          <a:effectRef idx="2">
-            <a:schemeClr val="accent1"/>
-          </a:effectRef>
-          <a:fontRef idx="minor">
-            <a:schemeClr val="lt1"/>
-          </a:fontRef>
-        </p:style>
-        <p:txBody>
-          <a:bodyPr rtlCol="0" anchor="ctr" lIns="0" rIns="0"/>
-          <a:lstStyle/>
-          <a:p>
-            <a:pPr algn="ctr"/>
-          </a:p>
-        </p:txBody>
-      </p:sp>
-      <p:sp>
-        <p:nvSpPr>
           <p:cNvPr id="8" name="TextBox 7"/>
           <p:cNvSpPr txBox="1"/>
           <p:nvPr/>
@@ -37463,50 +35879,6 @@
             <a:solidFill>
               <a:srgbClr val="E4E4E0"/>
             </a:solidFill>
-          </a:ln>
-          <a:effectLst/>
-        </p:spPr>
-        <p:style>
-          <a:lnRef idx="1">
-            <a:schemeClr val="accent1"/>
-          </a:lnRef>
-          <a:fillRef idx="3">
-            <a:schemeClr val="accent1"/>
-          </a:fillRef>
-          <a:effectRef idx="2">
-            <a:schemeClr val="accent1"/>
-          </a:effectRef>
-          <a:fontRef idx="minor">
-            <a:schemeClr val="lt1"/>
-          </a:fontRef>
-        </p:style>
-        <p:txBody>
-          <a:bodyPr rtlCol="0" anchor="ctr" lIns="0" rIns="0"/>
-          <a:lstStyle/>
-          <a:p>
-            <a:pPr algn="ctr"/>
-          </a:p>
-        </p:txBody>
-      </p:sp>
-      <p:sp>
-        <p:nvSpPr>
-          <p:cNvPr id="12" name="Rectangle 11"/>
-          <p:cNvSpPr/>
-          <p:nvPr/>
-        </p:nvSpPr>
-        <p:spPr>
-          <a:xfrm>
-            <a:off x="6291072" y="2121408"/>
-            <a:ext cx="91440" cy="1627632"/>
-          </a:xfrm>
-          <a:prstGeom prst="rect">
-            <a:avLst/>
-          </a:prstGeom>
-          <a:solidFill>
-            <a:srgbClr val="111111"/>
-          </a:solidFill>
-          <a:ln>
-            <a:solidFill/>
           </a:ln>
           <a:effectLst/>
         </p:spPr>
